--- a/clients/dcfs-ilc/planning/DCFS-AI-Framework-Krasan.pptx
+++ b/clients/dcfs-ilc/planning/DCFS-AI-Framework-Krasan.pptx
@@ -1518,33 +1518,9 @@
           <a:ln/>
         </p:spPr>
       </p:sp>
-      <p:pic>
-        <p:nvPicPr>
-          <p:cNvPr id="3" name="Image 0" descr="D:\Code\ussp\clients\dcfs-ilc\assets\krasan-logo.png">    </p:cNvPr>
-          <p:cNvPicPr>
-            <a:picLocks noChangeAspect="1"/>
-          </p:cNvPicPr>
-          <p:nvPr/>
-        </p:nvPicPr>
-        <p:blipFill>
-          <a:blip r:embed="rId1"/>
-          <a:stretch>
-            <a:fillRect/>
-          </a:stretch>
-        </p:blipFill>
-        <p:spPr>
-          <a:xfrm>
-            <a:off x="5029200" y="914400"/>
-            <a:ext cx="2194560" cy="548640"/>
-          </a:xfrm>
-          <a:prstGeom prst="rect">
-            <a:avLst/>
-          </a:prstGeom>
-        </p:spPr>
-      </p:pic>
-      <p:sp>
-        <p:nvSpPr>
-          <p:cNvPr id="4" name="Text 1"/>
+      <p:sp>
+        <p:nvSpPr>
+          <p:cNvPr id="3" name="Text 1"/>
           <p:cNvSpPr/>
           <p:nvPr/>
         </p:nvSpPr>
@@ -1583,7 +1559,7 @@
       </p:sp>
       <p:sp>
         <p:nvSpPr>
-          <p:cNvPr id="5" name="Text 2"/>
+          <p:cNvPr id="4" name="Text 2"/>
           <p:cNvSpPr/>
           <p:nvPr/>
         </p:nvSpPr>
@@ -1622,7 +1598,7 @@
       </p:sp>
       <p:sp>
         <p:nvSpPr>
-          <p:cNvPr id="6" name="Text 3"/>
+          <p:cNvPr id="5" name="Text 3"/>
           <p:cNvSpPr/>
           <p:nvPr/>
         </p:nvSpPr>
@@ -1706,7 +1682,7 @@
       </p:sp>
       <p:sp>
         <p:nvSpPr>
-          <p:cNvPr id="7" name="Text 4"/>
+          <p:cNvPr id="6" name="Text 4"/>
           <p:cNvSpPr/>
           <p:nvPr/>
         </p:nvSpPr>
@@ -11935,33 +11911,9 @@
           <a:ln/>
         </p:spPr>
       </p:sp>
-      <p:pic>
-        <p:nvPicPr>
-          <p:cNvPr id="3" name="Image 0" descr="D:\Code\ussp\clients\dcfs-ilc\assets\krasan-logo.png">    </p:cNvPr>
-          <p:cNvPicPr>
-            <a:picLocks noChangeAspect="1"/>
-          </p:cNvPicPr>
-          <p:nvPr/>
-        </p:nvPicPr>
-        <p:blipFill>
-          <a:blip r:embed="rId1"/>
-          <a:stretch>
-            <a:fillRect/>
-          </a:stretch>
-        </p:blipFill>
-        <p:spPr>
-          <a:xfrm>
-            <a:off x="457200" y="365760"/>
-            <a:ext cx="1828800" cy="457200"/>
-          </a:xfrm>
-          <a:prstGeom prst="rect">
-            <a:avLst/>
-          </a:prstGeom>
-        </p:spPr>
-      </p:pic>
-      <p:sp>
-        <p:nvSpPr>
-          <p:cNvPr id="4" name="Text 1"/>
+      <p:sp>
+        <p:nvSpPr>
+          <p:cNvPr id="3" name="Text 1"/>
           <p:cNvSpPr/>
           <p:nvPr/>
         </p:nvSpPr>
@@ -12000,7 +11952,7 @@
       </p:sp>
       <p:sp>
         <p:nvSpPr>
-          <p:cNvPr id="5" name="Text 2"/>
+          <p:cNvPr id="4" name="Text 2"/>
           <p:cNvSpPr/>
           <p:nvPr/>
         </p:nvSpPr>
@@ -12039,7 +11991,7 @@
       </p:sp>
       <p:sp>
         <p:nvSpPr>
-          <p:cNvPr id="6" name="Text 3"/>
+          <p:cNvPr id="5" name="Text 3"/>
           <p:cNvSpPr/>
           <p:nvPr/>
         </p:nvSpPr>
@@ -12078,7 +12030,7 @@
       </p:sp>
       <p:sp>
         <p:nvSpPr>
-          <p:cNvPr id="7" name="Text 4"/>
+          <p:cNvPr id="6" name="Text 4"/>
           <p:cNvSpPr/>
           <p:nvPr/>
         </p:nvSpPr>
@@ -12117,7 +12069,7 @@
       </p:sp>
       <p:sp>
         <p:nvSpPr>
-          <p:cNvPr id="8" name="Text 5"/>
+          <p:cNvPr id="7" name="Text 5"/>
           <p:cNvSpPr/>
           <p:nvPr/>
         </p:nvSpPr>
@@ -12156,7 +12108,7 @@
       </p:sp>
       <p:sp>
         <p:nvSpPr>
-          <p:cNvPr id="9" name="Shape 6"/>
+          <p:cNvPr id="8" name="Shape 6"/>
           <p:cNvSpPr/>
           <p:nvPr/>
         </p:nvSpPr>
@@ -12176,7 +12128,7 @@
       </p:sp>
       <p:sp>
         <p:nvSpPr>
-          <p:cNvPr id="10" name="Text 7"/>
+          <p:cNvPr id="9" name="Text 7"/>
           <p:cNvSpPr/>
           <p:nvPr/>
         </p:nvSpPr>
@@ -12215,7 +12167,7 @@
       </p:sp>
       <p:sp>
         <p:nvSpPr>
-          <p:cNvPr id="11" name="Text 8"/>
+          <p:cNvPr id="10" name="Text 8"/>
           <p:cNvSpPr/>
           <p:nvPr/>
         </p:nvSpPr>
@@ -12254,7 +12206,7 @@
       </p:sp>
       <p:sp>
         <p:nvSpPr>
-          <p:cNvPr id="12" name="Text 9"/>
+          <p:cNvPr id="11" name="Text 9"/>
           <p:cNvSpPr/>
           <p:nvPr/>
         </p:nvSpPr>
@@ -12293,7 +12245,7 @@
       </p:sp>
       <p:sp>
         <p:nvSpPr>
-          <p:cNvPr id="13" name="Text 10"/>
+          <p:cNvPr id="12" name="Text 10"/>
           <p:cNvSpPr/>
           <p:nvPr/>
         </p:nvSpPr>
@@ -12332,7 +12284,7 @@
       </p:sp>
       <p:sp>
         <p:nvSpPr>
-          <p:cNvPr id="14" name="Text 11"/>
+          <p:cNvPr id="13" name="Text 11"/>
           <p:cNvSpPr/>
           <p:nvPr/>
         </p:nvSpPr>
